--- a/RECURSOS/Presentacion.pptx
+++ b/RECURSOS/Presentacion.pptx
@@ -4707,7 +4707,7 @@
               </a:defRPr>
             </a:pPr>
             <a:r>
-              <a:t>• Repo: github.com/[IdEquipo]  ·  Demo: [URL Railway]</a:t>
+              <a:t>• Repo: github.com/tatiana441/283-proyecto-abierto-ia  ·  Demo: [URL Railway]</a:t>
             </a:r>
           </a:p>
           <a:p>
@@ -4737,7 +4737,7 @@
               </a:defRPr>
             </a:pPr>
             <a:r>
-              <a:t>• Equipo: Tatiana · Liliana Forero · [Integrante 3]</a:t>
+              <a:t>• Equipo: Tatiana Milena Muñoz · Liliana Forero Noguera · Jesus de Avila · Johan Cuellar</a:t>
             </a:r>
           </a:p>
         </p:txBody>

--- a/RECURSOS/Presentacion.pptx
+++ b/RECURSOS/Presentacion.pptx
@@ -4707,7 +4707,7 @@
               </a:defRPr>
             </a:pPr>
             <a:r>
-              <a:t>• Repo: github.com/tatiana441/283-proyecto-abierto-ia  ·  Demo: [URL Railway]</a:t>
+              <a:t>• Repo: github.com/tatiana441/283-proyecto-abierto-ia  ·  Demo: respectful-appreciation-production.up.railway.app</a:t>
             </a:r>
           </a:p>
           <a:p>
